--- a/app/templates/instituto/plantilla_curso_de_capacitacion.pptx
+++ b/app/templates/instituto/plantilla_curso_de_capacitacion.pptx
@@ -122,9 +122,165 @@
 <file path=ppt/revisionInfo.xml><?xml version="1.0" encoding="utf-8"?>
 <p1510:revInfo xmlns:a="http://schemas.openxmlformats.org/drawingml/2006/main" xmlns:r="http://schemas.openxmlformats.org/officeDocument/2006/relationships" xmlns:p1510="http://schemas.microsoft.com/office/powerpoint/2015/10/main">
   <p1510:revLst>
-    <p1510:client id="{0B94CA6E-66B1-4B83-BACA-5A0F4AD4A30E}" v="2" dt="2026-01-20T16:10:52.564"/>
+    <p1510:client id="{169A4E6D-D5C9-4E9C-ABB8-48140FBEFAE2}" v="4" dt="2026-03-05T19:03:57.793"/>
   </p1510:revLst>
 </p1510:revInfo>
+</file>
+
+<file path=ppt/changesInfos/changesInfo1.xml><?xml version="1.0" encoding="utf-8"?>
+<pc:chgInfo xmlns:a="http://schemas.openxmlformats.org/drawingml/2006/main" xmlns:r="http://schemas.openxmlformats.org/officeDocument/2006/relationships" xmlns:ac="http://schemas.microsoft.com/office/drawing/2013/main/command" xmlns:pc="http://schemas.microsoft.com/office/powerpoint/2013/main/command">
+  <pc:docChgLst>
+    <pc:chgData name="Benjamín de Jesús Cueva Niño de Guzmán" userId="56da303013910523" providerId="LiveId" clId="{532B7A48-8887-4F62-9537-0BA1FAE83637}"/>
+    <pc:docChg chg="custSel modSld">
+      <pc:chgData name="Benjamín de Jesús Cueva Niño de Guzmán" userId="56da303013910523" providerId="LiveId" clId="{532B7A48-8887-4F62-9537-0BA1FAE83637}" dt="2026-03-05T19:03:57.793" v="37"/>
+      <pc:docMkLst>
+        <pc:docMk/>
+      </pc:docMkLst>
+      <pc:sldChg chg="addSp delSp modSp mod">
+        <pc:chgData name="Benjamín de Jesús Cueva Niño de Guzmán" userId="56da303013910523" providerId="LiveId" clId="{532B7A48-8887-4F62-9537-0BA1FAE83637}" dt="2026-03-05T18:31:48.053" v="34" actId="1035"/>
+        <pc:sldMkLst>
+          <pc:docMk/>
+          <pc:sldMk cId="3524957515" sldId="338"/>
+        </pc:sldMkLst>
+        <pc:spChg chg="del">
+          <ac:chgData name="Benjamín de Jesús Cueva Niño de Guzmán" userId="56da303013910523" providerId="LiveId" clId="{532B7A48-8887-4F62-9537-0BA1FAE83637}" dt="2026-03-04T22:40:09.368" v="0" actId="478"/>
+          <ac:spMkLst>
+            <pc:docMk/>
+            <pc:sldMk cId="3524957515" sldId="338"/>
+            <ac:spMk id="2" creationId="{FEAA4293-5045-7AA5-190D-88DFB9E5E5EA}"/>
+          </ac:spMkLst>
+        </pc:spChg>
+        <pc:spChg chg="add mod">
+          <ac:chgData name="Benjamín de Jesús Cueva Niño de Guzmán" userId="56da303013910523" providerId="LiveId" clId="{532B7A48-8887-4F62-9537-0BA1FAE83637}" dt="2026-03-05T18:31:48.053" v="34" actId="1035"/>
+          <ac:spMkLst>
+            <pc:docMk/>
+            <pc:sldMk cId="3524957515" sldId="338"/>
+            <ac:spMk id="3" creationId="{E5308028-F4F8-F50F-D938-1E7AC5DD00D7}"/>
+          </ac:spMkLst>
+        </pc:spChg>
+        <pc:spChg chg="add mod">
+          <ac:chgData name="Benjamín de Jesús Cueva Niño de Guzmán" userId="56da303013910523" providerId="LiveId" clId="{532B7A48-8887-4F62-9537-0BA1FAE83637}" dt="2026-03-04T22:40:26.274" v="3"/>
+          <ac:spMkLst>
+            <pc:docMk/>
+            <pc:sldMk cId="3524957515" sldId="338"/>
+            <ac:spMk id="4" creationId="{BF0A1959-DD93-3848-F80B-ECA0861B65D5}"/>
+          </ac:spMkLst>
+        </pc:spChg>
+        <pc:spChg chg="add mod">
+          <ac:chgData name="Benjamín de Jesús Cueva Niño de Guzmán" userId="56da303013910523" providerId="LiveId" clId="{532B7A48-8887-4F62-9537-0BA1FAE83637}" dt="2026-03-04T22:40:26.274" v="3"/>
+          <ac:spMkLst>
+            <pc:docMk/>
+            <pc:sldMk cId="3524957515" sldId="338"/>
+            <ac:spMk id="7" creationId="{E31C008E-F69E-E4EC-A139-2D52A485323E}"/>
+          </ac:spMkLst>
+        </pc:spChg>
+        <pc:spChg chg="add mod">
+          <ac:chgData name="Benjamín de Jesús Cueva Niño de Guzmán" userId="56da303013910523" providerId="LiveId" clId="{532B7A48-8887-4F62-9537-0BA1FAE83637}" dt="2026-03-04T22:40:29.622" v="15" actId="20577"/>
+          <ac:spMkLst>
+            <pc:docMk/>
+            <pc:sldMk cId="3524957515" sldId="338"/>
+            <ac:spMk id="8" creationId="{B6BF96E8-B685-6D1B-4945-2183A2BFEF28}"/>
+          </ac:spMkLst>
+        </pc:spChg>
+        <pc:spChg chg="del">
+          <ac:chgData name="Benjamín de Jesús Cueva Niño de Guzmán" userId="56da303013910523" providerId="LiveId" clId="{532B7A48-8887-4F62-9537-0BA1FAE83637}" dt="2026-03-04T22:40:15.813" v="2" actId="478"/>
+          <ac:spMkLst>
+            <pc:docMk/>
+            <pc:sldMk cId="3524957515" sldId="338"/>
+            <ac:spMk id="15" creationId="{00000000-0000-0000-0000-000000000000}"/>
+          </ac:spMkLst>
+        </pc:spChg>
+        <pc:spChg chg="del">
+          <ac:chgData name="Benjamín de Jesús Cueva Niño de Guzmán" userId="56da303013910523" providerId="LiveId" clId="{532B7A48-8887-4F62-9537-0BA1FAE83637}" dt="2026-03-04T22:40:13.329" v="1" actId="478"/>
+          <ac:spMkLst>
+            <pc:docMk/>
+            <pc:sldMk cId="3524957515" sldId="338"/>
+            <ac:spMk id="16" creationId="{00000000-0000-0000-0000-000000000000}"/>
+          </ac:spMkLst>
+        </pc:spChg>
+        <pc:spChg chg="del">
+          <ac:chgData name="Benjamín de Jesús Cueva Niño de Guzmán" userId="56da303013910523" providerId="LiveId" clId="{532B7A48-8887-4F62-9537-0BA1FAE83637}" dt="2026-03-04T22:40:09.368" v="0" actId="478"/>
+          <ac:spMkLst>
+            <pc:docMk/>
+            <pc:sldMk cId="3524957515" sldId="338"/>
+            <ac:spMk id="18" creationId="{00000000-0000-0000-0000-000000000000}"/>
+          </ac:spMkLst>
+        </pc:spChg>
+        <pc:spChg chg="del">
+          <ac:chgData name="Benjamín de Jesús Cueva Niño de Guzmán" userId="56da303013910523" providerId="LiveId" clId="{532B7A48-8887-4F62-9537-0BA1FAE83637}" dt="2026-03-04T22:40:09.368" v="0" actId="478"/>
+          <ac:spMkLst>
+            <pc:docMk/>
+            <pc:sldMk cId="3524957515" sldId="338"/>
+            <ac:spMk id="20" creationId="{00000000-0000-0000-0000-000000000000}"/>
+          </ac:spMkLst>
+        </pc:spChg>
+        <pc:spChg chg="del">
+          <ac:chgData name="Benjamín de Jesús Cueva Niño de Guzmán" userId="56da303013910523" providerId="LiveId" clId="{532B7A48-8887-4F62-9537-0BA1FAE83637}" dt="2026-03-04T22:40:13.329" v="1" actId="478"/>
+          <ac:spMkLst>
+            <pc:docMk/>
+            <pc:sldMk cId="3524957515" sldId="338"/>
+            <ac:spMk id="31" creationId="{00000000-0000-0000-0000-000000000000}"/>
+          </ac:spMkLst>
+        </pc:spChg>
+        <pc:spChg chg="del">
+          <ac:chgData name="Benjamín de Jesús Cueva Niño de Guzmán" userId="56da303013910523" providerId="LiveId" clId="{532B7A48-8887-4F62-9537-0BA1FAE83637}" dt="2026-03-04T22:40:13.329" v="1" actId="478"/>
+          <ac:spMkLst>
+            <pc:docMk/>
+            <pc:sldMk cId="3524957515" sldId="338"/>
+            <ac:spMk id="33" creationId="{00000000-0000-0000-0000-000000000000}"/>
+          </ac:spMkLst>
+        </pc:spChg>
+      </pc:sldChg>
+      <pc:sldChg chg="addSp delSp modSp mod">
+        <pc:chgData name="Benjamín de Jesús Cueva Niño de Guzmán" userId="56da303013910523" providerId="LiveId" clId="{532B7A48-8887-4F62-9537-0BA1FAE83637}" dt="2026-03-05T19:03:57.793" v="37"/>
+        <pc:sldMkLst>
+          <pc:docMk/>
+          <pc:sldMk cId="2249577745" sldId="339"/>
+        </pc:sldMkLst>
+        <pc:spChg chg="del">
+          <ac:chgData name="Benjamín de Jesús Cueva Niño de Guzmán" userId="56da303013910523" providerId="LiveId" clId="{532B7A48-8887-4F62-9537-0BA1FAE83637}" dt="2026-03-05T19:03:57.552" v="36" actId="478"/>
+          <ac:spMkLst>
+            <pc:docMk/>
+            <pc:sldMk cId="2249577745" sldId="339"/>
+            <ac:spMk id="7" creationId="{05C52596-06F9-34E5-BF0B-633F1D4E78A2}"/>
+          </ac:spMkLst>
+        </pc:spChg>
+        <pc:spChg chg="add mod">
+          <ac:chgData name="Benjamín de Jesús Cueva Niño de Guzmán" userId="56da303013910523" providerId="LiveId" clId="{532B7A48-8887-4F62-9537-0BA1FAE83637}" dt="2026-03-05T19:03:57.793" v="37"/>
+          <ac:spMkLst>
+            <pc:docMk/>
+            <pc:sldMk cId="2249577745" sldId="339"/>
+            <ac:spMk id="8" creationId="{B189EA9C-DEA9-BE89-112A-39BEF111B735}"/>
+          </ac:spMkLst>
+        </pc:spChg>
+        <pc:spChg chg="mod">
+          <ac:chgData name="Benjamín de Jesús Cueva Niño de Guzmán" userId="56da303013910523" providerId="LiveId" clId="{532B7A48-8887-4F62-9537-0BA1FAE83637}" dt="2026-03-04T23:03:24.206" v="31" actId="962"/>
+          <ac:spMkLst>
+            <pc:docMk/>
+            <pc:sldMk cId="2249577745" sldId="339"/>
+            <ac:spMk id="15" creationId="{00000000-0000-0000-0000-000000000000}"/>
+          </ac:spMkLst>
+        </pc:spChg>
+        <pc:graphicFrameChg chg="modGraphic">
+          <ac:chgData name="Benjamín de Jesús Cueva Niño de Guzmán" userId="56da303013910523" providerId="LiveId" clId="{532B7A48-8887-4F62-9537-0BA1FAE83637}" dt="2026-03-05T19:03:54.731" v="35"/>
+          <ac:graphicFrameMkLst>
+            <pc:docMk/>
+            <pc:sldMk cId="2249577745" sldId="339"/>
+            <ac:graphicFrameMk id="18" creationId="{00000000-0000-0000-0000-000000000000}"/>
+          </ac:graphicFrameMkLst>
+        </pc:graphicFrameChg>
+        <pc:graphicFrameChg chg="mod modGraphic">
+          <ac:chgData name="Benjamín de Jesús Cueva Niño de Guzmán" userId="56da303013910523" providerId="LiveId" clId="{532B7A48-8887-4F62-9537-0BA1FAE83637}" dt="2026-03-04T23:03:34.831" v="33" actId="255"/>
+          <ac:graphicFrameMkLst>
+            <pc:docMk/>
+            <pc:sldMk cId="2249577745" sldId="339"/>
+            <ac:graphicFrameMk id="20" creationId="{00000000-0000-0000-0000-000000000000}"/>
+          </ac:graphicFrameMkLst>
+        </pc:graphicFrameChg>
+      </pc:sldChg>
+    </pc:docChg>
+  </pc:docChgLst>
+</pc:chgInfo>
 </file>
 
 <file path=ppt/handoutMasters/handoutMaster1.xml><?xml version="1.0" encoding="utf-8"?>
@@ -209,7 +365,7 @@
           <a:p>
             <a:fld id="{03C7FEFC-EB52-44D6-B3F1-2A7BB7FA4226}" type="datetimeFigureOut">
               <a:rPr lang="es-PE" smtClean="0"/>
-              <a:t>2/02/2026</a:t>
+              <a:t>7/06/2026</a:t>
             </a:fld>
             <a:endParaRPr lang="es-PE" dirty="0"/>
           </a:p>
@@ -374,7 +530,7 @@
           <a:p>
             <a:fld id="{64955E78-CBAA-441B-9163-D9CD5E983BDA}" type="datetimeFigureOut">
               <a:rPr lang="en-US" smtClean="0"/>
-              <a:t>2/2/2026</a:t>
+              <a:t>6/7/2026</a:t>
             </a:fld>
             <a:endParaRPr lang="en-US" dirty="0"/>
           </a:p>
@@ -951,7 +1107,7 @@
           <a:p>
             <a:fld id="{5C4C4E00-4716-4B48-9D97-535E4F94A274}" type="datetimeFigureOut">
               <a:rPr lang="es-PE" smtClean="0"/>
-              <a:t>2/02/2026</a:t>
+              <a:t>7/06/2026</a:t>
             </a:fld>
             <a:endParaRPr lang="es-PE" dirty="0"/>
           </a:p>
@@ -1121,7 +1277,7 @@
           <a:p>
             <a:fld id="{5C4C4E00-4716-4B48-9D97-535E4F94A274}" type="datetimeFigureOut">
               <a:rPr lang="es-PE" smtClean="0"/>
-              <a:t>2/02/2026</a:t>
+              <a:t>7/06/2026</a:t>
             </a:fld>
             <a:endParaRPr lang="es-PE" dirty="0"/>
           </a:p>
@@ -1301,7 +1457,7 @@
           <a:p>
             <a:fld id="{5C4C4E00-4716-4B48-9D97-535E4F94A274}" type="datetimeFigureOut">
               <a:rPr lang="es-PE" smtClean="0"/>
-              <a:t>2/02/2026</a:t>
+              <a:t>7/06/2026</a:t>
             </a:fld>
             <a:endParaRPr lang="es-PE" dirty="0"/>
           </a:p>
@@ -1471,7 +1627,7 @@
           <a:p>
             <a:fld id="{5C4C4E00-4716-4B48-9D97-535E4F94A274}" type="datetimeFigureOut">
               <a:rPr lang="es-PE" smtClean="0"/>
-              <a:t>2/02/2026</a:t>
+              <a:t>7/06/2026</a:t>
             </a:fld>
             <a:endParaRPr lang="es-PE" dirty="0"/>
           </a:p>
@@ -1715,7 +1871,7 @@
           <a:p>
             <a:fld id="{5C4C4E00-4716-4B48-9D97-535E4F94A274}" type="datetimeFigureOut">
               <a:rPr lang="es-PE" smtClean="0"/>
-              <a:t>2/02/2026</a:t>
+              <a:t>7/06/2026</a:t>
             </a:fld>
             <a:endParaRPr lang="es-PE" dirty="0"/>
           </a:p>
@@ -1947,7 +2103,7 @@
           <a:p>
             <a:fld id="{5C4C4E00-4716-4B48-9D97-535E4F94A274}" type="datetimeFigureOut">
               <a:rPr lang="es-PE" smtClean="0"/>
-              <a:t>2/02/2026</a:t>
+              <a:t>7/06/2026</a:t>
             </a:fld>
             <a:endParaRPr lang="es-PE" dirty="0"/>
           </a:p>
@@ -2314,7 +2470,7 @@
           <a:p>
             <a:fld id="{5C4C4E00-4716-4B48-9D97-535E4F94A274}" type="datetimeFigureOut">
               <a:rPr lang="es-PE" smtClean="0"/>
-              <a:t>2/02/2026</a:t>
+              <a:t>7/06/2026</a:t>
             </a:fld>
             <a:endParaRPr lang="es-PE" dirty="0"/>
           </a:p>
@@ -2432,7 +2588,7 @@
           <a:p>
             <a:fld id="{5C4C4E00-4716-4B48-9D97-535E4F94A274}" type="datetimeFigureOut">
               <a:rPr lang="es-PE" smtClean="0"/>
-              <a:t>2/02/2026</a:t>
+              <a:t>7/06/2026</a:t>
             </a:fld>
             <a:endParaRPr lang="es-PE" dirty="0"/>
           </a:p>
@@ -2527,7 +2683,7 @@
           <a:p>
             <a:fld id="{5C4C4E00-4716-4B48-9D97-535E4F94A274}" type="datetimeFigureOut">
               <a:rPr lang="es-PE" smtClean="0"/>
-              <a:t>2/02/2026</a:t>
+              <a:t>7/06/2026</a:t>
             </a:fld>
             <a:endParaRPr lang="es-PE" dirty="0"/>
           </a:p>
@@ -2804,7 +2960,7 @@
           <a:p>
             <a:fld id="{5C4C4E00-4716-4B48-9D97-535E4F94A274}" type="datetimeFigureOut">
               <a:rPr lang="es-PE" smtClean="0"/>
-              <a:t>2/02/2026</a:t>
+              <a:t>7/06/2026</a:t>
             </a:fld>
             <a:endParaRPr lang="es-PE" dirty="0"/>
           </a:p>
@@ -3061,7 +3217,7 @@
           <a:p>
             <a:fld id="{5C4C4E00-4716-4B48-9D97-535E4F94A274}" type="datetimeFigureOut">
               <a:rPr lang="es-PE" smtClean="0"/>
-              <a:t>2/02/2026</a:t>
+              <a:t>7/06/2026</a:t>
             </a:fld>
             <a:endParaRPr lang="es-PE" dirty="0"/>
           </a:p>
@@ -3274,7 +3430,7 @@
           <a:p>
             <a:fld id="{5C4C4E00-4716-4B48-9D97-535E4F94A274}" type="datetimeFigureOut">
               <a:rPr lang="es-PE" smtClean="0"/>
-              <a:t>2/02/2026</a:t>
+              <a:t>7/06/2026</a:t>
             </a:fld>
             <a:endParaRPr lang="es-PE" dirty="0"/>
           </a:p>
@@ -3782,221 +3938,6 @@
       </p:sp>
       <p:sp>
         <p:nvSpPr>
-          <p:cNvPr id="15" name="CuadroTexto 14"/>
-          <p:cNvSpPr txBox="1"/>
-          <p:nvPr/>
-        </p:nvSpPr>
-        <p:spPr>
-          <a:xfrm>
-            <a:off x="2724320" y="2654395"/>
-            <a:ext cx="1409360" cy="369332"/>
-          </a:xfrm>
-          <a:prstGeom prst="rect">
-            <a:avLst/>
-          </a:prstGeom>
-          <a:noFill/>
-        </p:spPr>
-        <p:txBody>
-          <a:bodyPr wrap="none" rtlCol="0">
-            <a:spAutoFit/>
-          </a:bodyPr>
-          <a:lstStyle/>
-          <a:p>
-            <a:pPr algn="ctr"/>
-            <a:r>
-              <a:rPr lang="es-PE" dirty="0"/>
-              <a:t>Concedido a:</a:t>
-            </a:r>
-          </a:p>
-        </p:txBody>
-      </p:sp>
-      <p:sp>
-        <p:nvSpPr>
-          <p:cNvPr id="16" name="CuadroTexto 15"/>
-          <p:cNvSpPr txBox="1"/>
-          <p:nvPr/>
-        </p:nvSpPr>
-        <p:spPr>
-          <a:xfrm>
-            <a:off x="1227916" y="3858116"/>
-            <a:ext cx="4402167" cy="584775"/>
-          </a:xfrm>
-          <a:prstGeom prst="rect">
-            <a:avLst/>
-          </a:prstGeom>
-          <a:noFill/>
-        </p:spPr>
-        <p:txBody>
-          <a:bodyPr wrap="none" rtlCol="0">
-            <a:spAutoFit/>
-          </a:bodyPr>
-          <a:lstStyle/>
-          <a:p>
-            <a:pPr algn="ctr"/>
-            <a:r>
-              <a:rPr lang="es-PE" sz="1600" dirty="0">
-                <a:latin typeface="Baskerville Old Face" panose="02020602080505020303" pitchFamily="18" charset="0"/>
-              </a:rPr>
-              <a:t>Por haber culminado satisfactoriamente el CURSO </a:t>
-            </a:r>
-          </a:p>
-          <a:p>
-            <a:pPr algn="ctr"/>
-            <a:r>
-              <a:rPr lang="es-PE" sz="1600" dirty="0">
-                <a:latin typeface="Baskerville Old Face" panose="02020602080505020303" pitchFamily="18" charset="0"/>
-              </a:rPr>
-              <a:t>DE CAPACITACIÓN en:</a:t>
-            </a:r>
-          </a:p>
-        </p:txBody>
-      </p:sp>
-      <p:sp>
-        <p:nvSpPr>
-          <p:cNvPr id="18" name="CuadroTexto 17"/>
-          <p:cNvSpPr txBox="1"/>
-          <p:nvPr/>
-        </p:nvSpPr>
-        <p:spPr>
-          <a:xfrm>
-            <a:off x="384576" y="5312779"/>
-            <a:ext cx="6088849" cy="830997"/>
-          </a:xfrm>
-          <a:prstGeom prst="rect">
-            <a:avLst/>
-          </a:prstGeom>
-          <a:noFill/>
-        </p:spPr>
-        <p:txBody>
-          <a:bodyPr wrap="square" rtlCol="0">
-            <a:spAutoFit/>
-          </a:bodyPr>
-          <a:lstStyle/>
-          <a:p>
-            <a:pPr algn="ctr"/>
-            <a:r>
-              <a:rPr lang="es-PE" sz="1600" dirty="0">
-                <a:latin typeface="Baskerville Old Face" panose="02020602080505020303" pitchFamily="18" charset="0"/>
-              </a:rPr>
-              <a:t>Realizado del {{FECHA_INICIO}} al {{FECHA_FIN}}, </a:t>
-            </a:r>
-          </a:p>
-          <a:p>
-            <a:pPr algn="ctr"/>
-            <a:r>
-              <a:rPr lang="es-PE" sz="1600" dirty="0">
-                <a:latin typeface="Baskerville Old Face" panose="02020602080505020303" pitchFamily="18" charset="0"/>
-              </a:rPr>
-              <a:t>con una duración de {{HORAS_ACADEMICAS}} horas lectivas y {{CREDITOS_ACADEMICOS}} créditos Académicos</a:t>
-            </a:r>
-            <a:r>
-              <a:rPr lang="es-PE" sz="1600" dirty="0">
-                <a:solidFill>
-                  <a:srgbClr val="000000"/>
-                </a:solidFill>
-                <a:latin typeface="Times New Roman" panose="02020603050405020304" pitchFamily="18" charset="0"/>
-                <a:ea typeface="Times New Roman" panose="02020603050405020304" pitchFamily="18" charset="0"/>
-                <a:cs typeface="Times New Roman" panose="02020603050405020304" pitchFamily="18" charset="0"/>
-              </a:rPr>
-              <a:t>.</a:t>
-            </a:r>
-            <a:endParaRPr lang="es-PE" sz="900" dirty="0">
-              <a:solidFill>
-                <a:srgbClr val="000000"/>
-              </a:solidFill>
-              <a:latin typeface="Times New Roman" panose="02020603050405020304" pitchFamily="18" charset="0"/>
-              <a:ea typeface="Times New Roman" panose="02020603050405020304" pitchFamily="18" charset="0"/>
-              <a:cs typeface="Times New Roman" panose="02020603050405020304" pitchFamily="18" charset="0"/>
-            </a:endParaRPr>
-          </a:p>
-        </p:txBody>
-      </p:sp>
-      <p:sp>
-        <p:nvSpPr>
-          <p:cNvPr id="20" name="CuadroTexto 19"/>
-          <p:cNvSpPr txBox="1"/>
-          <p:nvPr/>
-        </p:nvSpPr>
-        <p:spPr>
-          <a:xfrm>
-            <a:off x="405576" y="5899401"/>
-            <a:ext cx="6046848" cy="584775"/>
-          </a:xfrm>
-          <a:prstGeom prst="rect">
-            <a:avLst/>
-          </a:prstGeom>
-          <a:noFill/>
-        </p:spPr>
-        <p:txBody>
-          <a:bodyPr wrap="none" rtlCol="0">
-            <a:spAutoFit/>
-          </a:bodyPr>
-          <a:lstStyle/>
-          <a:p>
-            <a:pPr algn="ctr"/>
-            <a:r>
-              <a:rPr lang="es-PE" sz="1600" dirty="0">
-                <a:latin typeface="Baskerville Old Face" panose="02020602080505020303" pitchFamily="18" charset="0"/>
-              </a:rPr>
-              <a:t>Por tanto, se expide el presente Certificado, otorgándole los privilegios y</a:t>
-            </a:r>
-            <a:br>
-              <a:rPr lang="es-PE" sz="1600" dirty="0">
-                <a:latin typeface="Baskerville Old Face" panose="02020602080505020303" pitchFamily="18" charset="0"/>
-              </a:rPr>
-            </a:br>
-            <a:r>
-              <a:rPr lang="es-PE" sz="1600" dirty="0">
-                <a:latin typeface="Baskerville Old Face" panose="02020602080505020303" pitchFamily="18" charset="0"/>
-              </a:rPr>
-              <a:t>consideraciones que le corresponden.</a:t>
-            </a:r>
-          </a:p>
-        </p:txBody>
-      </p:sp>
-      <p:sp>
-        <p:nvSpPr>
-          <p:cNvPr id="33" name="CuadroTexto 32"/>
-          <p:cNvSpPr txBox="1"/>
-          <p:nvPr/>
-        </p:nvSpPr>
-        <p:spPr>
-          <a:xfrm>
-            <a:off x="618878" y="2960696"/>
-            <a:ext cx="5620244" cy="954107"/>
-          </a:xfrm>
-          <a:prstGeom prst="rect">
-            <a:avLst/>
-          </a:prstGeom>
-          <a:noFill/>
-        </p:spPr>
-        <p:txBody>
-          <a:bodyPr wrap="square" rtlCol="0">
-            <a:spAutoFit/>
-          </a:bodyPr>
-          <a:lstStyle/>
-          <a:p>
-            <a:pPr algn="ctr"/>
-            <a:r>
-              <a:rPr lang="es-ES" sz="2800" dirty="0">
-                <a:latin typeface="Baskerville Old Face" panose="02020602080505020303" pitchFamily="18" charset="0"/>
-              </a:rPr>
-              <a:t>{{NOMBRES}}</a:t>
-            </a:r>
-          </a:p>
-          <a:p>
-            <a:pPr algn="ctr"/>
-            <a:r>
-              <a:rPr lang="es-ES" sz="2800" dirty="0">
-                <a:latin typeface="Baskerville Old Face" panose="02020602080505020303" pitchFamily="18" charset="0"/>
-              </a:rPr>
-              <a:t>{{APELLIDOS}}</a:t>
-            </a:r>
-          </a:p>
-        </p:txBody>
-      </p:sp>
-      <p:sp>
-        <p:nvSpPr>
           <p:cNvPr id="25" name="CuadroTexto 24"/>
           <p:cNvSpPr txBox="1"/>
           <p:nvPr/>
@@ -4035,50 +3976,6 @@
                 <a:latin typeface="Arial Rounded MT Bold" panose="020F0704030504030204" pitchFamily="34" charset="0"/>
               </a:rPr>
               <a:t>ACADÉMICA Y SOCIAL BERLÍN SRL</a:t>
-            </a:r>
-          </a:p>
-        </p:txBody>
-      </p:sp>
-      <p:sp>
-        <p:nvSpPr>
-          <p:cNvPr id="31" name="CuadroTexto 30"/>
-          <p:cNvSpPr txBox="1"/>
-          <p:nvPr/>
-        </p:nvSpPr>
-        <p:spPr>
-          <a:xfrm>
-            <a:off x="525840" y="4392406"/>
-            <a:ext cx="5806320" cy="523220"/>
-          </a:xfrm>
-          <a:prstGeom prst="rect">
-            <a:avLst/>
-          </a:prstGeom>
-          <a:noFill/>
-        </p:spPr>
-        <p:txBody>
-          <a:bodyPr wrap="square" rtlCol="0">
-            <a:spAutoFit/>
-          </a:bodyPr>
-          <a:lstStyle/>
-          <a:p>
-            <a:pPr algn="ctr"/>
-            <a:r>
-              <a:rPr lang="es-PE" sz="2700" dirty="0">
-                <a:latin typeface="Baskerville Old Face" panose="02020602080505020303" pitchFamily="18" charset="0"/>
-              </a:rPr>
-              <a:t>“</a:t>
-            </a:r>
-            <a:r>
-              <a:rPr lang="es-ES" sz="2800" dirty="0">
-                <a:latin typeface="Baskerville Old Face" panose="02020602080505020303" pitchFamily="18" charset="0"/>
-              </a:rPr>
-              <a:t>{{TEMA_DIPLOMADO}}</a:t>
-            </a:r>
-            <a:r>
-              <a:rPr lang="es-PE" sz="2800" dirty="0">
-                <a:latin typeface="Baskerville Old Face" panose="02020602080505020303" pitchFamily="18" charset="0"/>
-              </a:rPr>
-              <a:t>”</a:t>
             </a:r>
           </a:p>
         </p:txBody>
@@ -4506,10 +4403,10 @@
       </p:grpSp>
       <p:sp>
         <p:nvSpPr>
-          <p:cNvPr id="2" name="CuadroTexto 1">
+          <p:cNvPr id="3" name="PH_CONTENIDO_PRINCIPAL">
             <a:extLst>
               <a:ext uri="{FF2B5EF4-FFF2-40B4-BE49-F238E27FC236}">
-                <a16:creationId xmlns:a16="http://schemas.microsoft.com/office/drawing/2014/main" id="{FEAA4293-5045-7AA5-190D-88DFB9E5E5EA}"/>
+                <a16:creationId xmlns:a16="http://schemas.microsoft.com/office/drawing/2014/main" id="{E5308028-F4F8-F50F-D938-1E7AC5DD00D7}"/>
               </a:ext>
             </a:extLst>
           </p:cNvPr>
@@ -4518,8 +4415,8 @@
         </p:nvSpPr>
         <p:spPr>
           <a:xfrm>
-            <a:off x="2850325" y="6669218"/>
-            <a:ext cx="3623108" cy="338554"/>
+            <a:off x="406666" y="4232834"/>
+            <a:ext cx="6044668" cy="2431435"/>
           </a:xfrm>
           <a:prstGeom prst="rect">
             <a:avLst/>
@@ -4527,17 +4424,246 @@
           <a:noFill/>
         </p:spPr>
         <p:txBody>
+          <a:bodyPr wrap="square" rtlCol="0" anchor="t" anchorCtr="1">
+            <a:spAutoFit/>
+          </a:bodyPr>
+          <a:lstStyle/>
+          <a:p>
+            <a:pPr algn="ctr"/>
+            <a:r>
+              <a:rPr lang="es-PE" sz="2700" dirty="0">
+                <a:latin typeface="Baskerville Old Face" panose="02020602080505020303" pitchFamily="18" charset="0"/>
+              </a:rPr>
+              <a:t>“</a:t>
+            </a:r>
+            <a:r>
+              <a:rPr lang="es-ES" sz="2800" dirty="0">
+                <a:latin typeface="Baskerville Old Face" panose="02020602080505020303" pitchFamily="18" charset="0"/>
+              </a:rPr>
+              <a:t>{{TEMA_DIPLOMADO}}</a:t>
+            </a:r>
+            <a:r>
+              <a:rPr lang="es-PE" sz="2800" dirty="0">
+                <a:latin typeface="Baskerville Old Face" panose="02020602080505020303" pitchFamily="18" charset="0"/>
+              </a:rPr>
+              <a:t>”</a:t>
+            </a:r>
+          </a:p>
+          <a:p>
+            <a:pPr algn="ctr"/>
+            <a:endParaRPr lang="es-PE" sz="400" dirty="0">
+              <a:latin typeface="Baskerville Old Face" panose="02020602080505020303" pitchFamily="18" charset="0"/>
+            </a:endParaRPr>
+          </a:p>
+          <a:p>
+            <a:pPr algn="ctr"/>
+            <a:r>
+              <a:rPr lang="es-PE" sz="1600" dirty="0">
+                <a:latin typeface="Baskerville Old Face" panose="02020602080505020303" pitchFamily="18" charset="0"/>
+              </a:rPr>
+              <a:t>Realizado del {{FECHA_INICIO}} al {{FECHA_FIN}}, </a:t>
+            </a:r>
+          </a:p>
+          <a:p>
+            <a:pPr algn="ctr"/>
+            <a:r>
+              <a:rPr lang="es-PE" sz="1600" dirty="0">
+                <a:latin typeface="Baskerville Old Face" panose="02020602080505020303" pitchFamily="18" charset="0"/>
+              </a:rPr>
+              <a:t>con una duración de {{HORAS_ACADEMICAS}} horas lectivas y {{CREDITOS_ACADEMICOS}} créditos Académicos</a:t>
+            </a:r>
+            <a:r>
+              <a:rPr lang="es-PE" sz="1600" dirty="0">
+                <a:solidFill>
+                  <a:srgbClr val="000000"/>
+                </a:solidFill>
+                <a:latin typeface="Times New Roman" panose="02020603050405020304" pitchFamily="18" charset="0"/>
+                <a:ea typeface="Times New Roman" panose="02020603050405020304" pitchFamily="18" charset="0"/>
+                <a:cs typeface="Times New Roman" panose="02020603050405020304" pitchFamily="18" charset="0"/>
+              </a:rPr>
+              <a:t>.</a:t>
+            </a:r>
+          </a:p>
+          <a:p>
+            <a:pPr algn="ctr"/>
+            <a:endParaRPr lang="es-PE" sz="400" dirty="0">
+              <a:solidFill>
+                <a:srgbClr val="000000"/>
+              </a:solidFill>
+              <a:latin typeface="Times New Roman" panose="02020603050405020304" pitchFamily="18" charset="0"/>
+              <a:ea typeface="Times New Roman" panose="02020603050405020304" pitchFamily="18" charset="0"/>
+              <a:cs typeface="Times New Roman" panose="02020603050405020304" pitchFamily="18" charset="0"/>
+            </a:endParaRPr>
+          </a:p>
+          <a:p>
+            <a:pPr algn="ctr"/>
+            <a:r>
+              <a:rPr lang="es-PE" sz="1600" dirty="0">
+                <a:latin typeface="Baskerville Old Face" panose="02020602080505020303" pitchFamily="18" charset="0"/>
+              </a:rPr>
+              <a:t>Por tanto, se expide el presente Certificado, otorgándole los privilegios y</a:t>
+            </a:r>
+            <a:br>
+              <a:rPr lang="es-PE" sz="1600" dirty="0">
+                <a:latin typeface="Baskerville Old Face" panose="02020602080505020303" pitchFamily="18" charset="0"/>
+              </a:rPr>
+            </a:br>
+            <a:r>
+              <a:rPr lang="es-PE" sz="1600" dirty="0">
+                <a:latin typeface="Baskerville Old Face" panose="02020602080505020303" pitchFamily="18" charset="0"/>
+              </a:rPr>
+              <a:t>consideraciones que le corresponden.</a:t>
+            </a:r>
+          </a:p>
+          <a:p>
+            <a:pPr algn="ctr"/>
+            <a:endParaRPr lang="es-PE" sz="400" dirty="0">
+              <a:latin typeface="Baskerville Old Face" panose="02020602080505020303" pitchFamily="18" charset="0"/>
+            </a:endParaRPr>
+          </a:p>
+          <a:p>
+            <a:pPr algn="ctr"/>
+            <a:r>
+              <a:rPr lang="es-PE" sz="1600">
+                <a:latin typeface="Baskerville Old Face" panose="02020602080505020303" pitchFamily="18" charset="0"/>
+              </a:rPr>
+              <a:t>                                                         {{</a:t>
+            </a:r>
+            <a:r>
+              <a:rPr lang="es-PE" sz="1600" dirty="0">
+                <a:latin typeface="Baskerville Old Face" panose="02020602080505020303" pitchFamily="18" charset="0"/>
+              </a:rPr>
+              <a:t>CIUDAD}}, {{FECHA_EMISION_LARGA}}</a:t>
+            </a:r>
+          </a:p>
+        </p:txBody>
+      </p:sp>
+      <p:sp>
+        <p:nvSpPr>
+          <p:cNvPr id="4" name="CuadroTexto 3">
+            <a:extLst>
+              <a:ext uri="{FF2B5EF4-FFF2-40B4-BE49-F238E27FC236}">
+                <a16:creationId xmlns:a16="http://schemas.microsoft.com/office/drawing/2014/main" id="{BF0A1959-DD93-3848-F80B-ECA0861B65D5}"/>
+              </a:ext>
+            </a:extLst>
+          </p:cNvPr>
+          <p:cNvSpPr txBox="1"/>
+          <p:nvPr/>
+        </p:nvSpPr>
+        <p:spPr>
+          <a:xfrm>
+            <a:off x="618878" y="2880014"/>
+            <a:ext cx="5620244" cy="954107"/>
+          </a:xfrm>
+          <a:prstGeom prst="rect">
+            <a:avLst/>
+          </a:prstGeom>
+          <a:noFill/>
+        </p:spPr>
+        <p:txBody>
+          <a:bodyPr wrap="square" rtlCol="0">
+            <a:spAutoFit/>
+          </a:bodyPr>
+          <a:lstStyle/>
+          <a:p>
+            <a:pPr algn="ctr"/>
+            <a:r>
+              <a:rPr lang="es-ES" sz="2800" dirty="0">
+                <a:latin typeface="Baskerville Old Face" panose="02020602080505020303" pitchFamily="18" charset="0"/>
+              </a:rPr>
+              <a:t>{{NOMBRES}}</a:t>
+            </a:r>
+          </a:p>
+          <a:p>
+            <a:pPr algn="ctr"/>
+            <a:r>
+              <a:rPr lang="es-ES" sz="2800" dirty="0">
+                <a:latin typeface="Baskerville Old Face" panose="02020602080505020303" pitchFamily="18" charset="0"/>
+              </a:rPr>
+              <a:t>{{APELLIDOS}}</a:t>
+            </a:r>
+          </a:p>
+        </p:txBody>
+      </p:sp>
+      <p:sp>
+        <p:nvSpPr>
+          <p:cNvPr id="7" name="CuadroTexto 6">
+            <a:extLst>
+              <a:ext uri="{FF2B5EF4-FFF2-40B4-BE49-F238E27FC236}">
+                <a16:creationId xmlns:a16="http://schemas.microsoft.com/office/drawing/2014/main" id="{E31C008E-F69E-E4EC-A139-2D52A485323E}"/>
+              </a:ext>
+            </a:extLst>
+          </p:cNvPr>
+          <p:cNvSpPr txBox="1"/>
+          <p:nvPr/>
+        </p:nvSpPr>
+        <p:spPr>
+          <a:xfrm>
+            <a:off x="2724320" y="2614054"/>
+            <a:ext cx="1409360" cy="369332"/>
+          </a:xfrm>
+          <a:prstGeom prst="rect">
+            <a:avLst/>
+          </a:prstGeom>
+          <a:noFill/>
+        </p:spPr>
+        <p:txBody>
           <a:bodyPr wrap="none" rtlCol="0">
             <a:spAutoFit/>
           </a:bodyPr>
           <a:lstStyle/>
           <a:p>
-            <a:pPr algn="r"/>
+            <a:pPr algn="ctr"/>
+            <a:r>
+              <a:rPr lang="es-PE" dirty="0"/>
+              <a:t>Concedido a:</a:t>
+            </a:r>
+          </a:p>
+        </p:txBody>
+      </p:sp>
+      <p:sp>
+        <p:nvSpPr>
+          <p:cNvPr id="8" name="CuadroTexto 7">
+            <a:extLst>
+              <a:ext uri="{FF2B5EF4-FFF2-40B4-BE49-F238E27FC236}">
+                <a16:creationId xmlns:a16="http://schemas.microsoft.com/office/drawing/2014/main" id="{B6BF96E8-B685-6D1B-4945-2183A2BFEF28}"/>
+              </a:ext>
+            </a:extLst>
+          </p:cNvPr>
+          <p:cNvSpPr txBox="1"/>
+          <p:nvPr/>
+        </p:nvSpPr>
+        <p:spPr>
+          <a:xfrm>
+            <a:off x="1227918" y="3763987"/>
+            <a:ext cx="4402167" cy="584775"/>
+          </a:xfrm>
+          <a:prstGeom prst="rect">
+            <a:avLst/>
+          </a:prstGeom>
+          <a:noFill/>
+        </p:spPr>
+        <p:txBody>
+          <a:bodyPr wrap="none" rtlCol="0">
+            <a:spAutoFit/>
+          </a:bodyPr>
+          <a:lstStyle/>
+          <a:p>
+            <a:pPr algn="ctr"/>
             <a:r>
               <a:rPr lang="es-PE" sz="1600" dirty="0">
                 <a:latin typeface="Baskerville Old Face" panose="02020602080505020303" pitchFamily="18" charset="0"/>
               </a:rPr>
-              <a:t>Trujillo, {{FECHA_EMISION_LARGA}}</a:t>
+              <a:t>Por haber culminado satisfactoriamente el CURSO </a:t>
+            </a:r>
+          </a:p>
+          <a:p>
+            <a:pPr algn="ctr"/>
+            <a:r>
+              <a:rPr lang="es-PE" sz="1600" dirty="0">
+                <a:latin typeface="Baskerville Old Face" panose="02020602080505020303" pitchFamily="18" charset="0"/>
+              </a:rPr>
+              <a:t>DE CAPACITACIÓN en:</a:t>
             </a:r>
           </a:p>
         </p:txBody>
@@ -4863,14 +4989,14 @@
           <p:nvPr>
             <p:extLst>
               <p:ext uri="{D42A27DB-BD31-4B8C-83A1-F6EECF244321}">
-                <p14:modId xmlns:p14="http://schemas.microsoft.com/office/powerpoint/2010/main" val="1714684353"/>
+                <p14:modId xmlns:p14="http://schemas.microsoft.com/office/powerpoint/2010/main" val="3128192680"/>
               </p:ext>
             </p:extLst>
           </p:nvPr>
         </p:nvGraphicFramePr>
         <p:xfrm>
           <a:off x="611665" y="7771187"/>
-          <a:ext cx="2251851" cy="1959750"/>
+          <a:ext cx="2268000" cy="1959750"/>
         </p:xfrm>
         <a:graphic>
           <a:graphicData uri="http://schemas.openxmlformats.org/drawingml/2006/table">
@@ -4879,14 +5005,14 @@
                 <a:tableStyleId>{F2DE63D5-997A-4646-A377-4702673A728D}</a:tableStyleId>
               </a:tblPr>
               <a:tblGrid>
-                <a:gridCol w="1119432">
+                <a:gridCol w="1127460">
                   <a:extLst>
                     <a:ext uri="{9D8B030D-6E8A-4147-A177-3AD203B41FA5}">
                       <a16:colId xmlns:a16="http://schemas.microsoft.com/office/drawing/2014/main" val="3956221826"/>
                     </a:ext>
                   </a:extLst>
                 </a:gridCol>
-                <a:gridCol w="1132419">
+                <a:gridCol w="1140540">
                   <a:extLst>
                     <a:ext uri="{9D8B030D-6E8A-4147-A177-3AD203B41FA5}">
                       <a16:colId xmlns:a16="http://schemas.microsoft.com/office/drawing/2014/main" val="3056520887"/>
@@ -5093,7 +5219,7 @@
       </p:graphicFrame>
       <p:sp>
         <p:nvSpPr>
-          <p:cNvPr id="15" name="Rectángulo 14"/>
+          <p:cNvPr id="15" name="PH_TEMA"/>
           <p:cNvSpPr/>
           <p:nvPr/>
         </p:nvSpPr>
@@ -5161,20 +5287,20 @@
       </p:sp>
       <p:graphicFrame>
         <p:nvGraphicFramePr>
-          <p:cNvPr id="20" name="Tabla 19"/>
+          <p:cNvPr id="20" name="PH_TABLA"/>
           <p:cNvGraphicFramePr>
             <a:graphicFrameLocks noGrp="1"/>
           </p:cNvGraphicFramePr>
           <p:nvPr>
             <p:extLst>
               <p:ext uri="{D42A27DB-BD31-4B8C-83A1-F6EECF244321}">
-                <p14:modId xmlns:p14="http://schemas.microsoft.com/office/powerpoint/2010/main" val="153981975"/>
+                <p14:modId xmlns:p14="http://schemas.microsoft.com/office/powerpoint/2010/main" val="4150559136"/>
               </p:ext>
             </p:extLst>
           </p:nvPr>
         </p:nvGraphicFramePr>
         <p:xfrm>
-          <a:off x="745017" y="3009236"/>
+          <a:off x="745017" y="2820978"/>
           <a:ext cx="5367967" cy="4040856"/>
         </p:xfrm>
         <a:graphic>
@@ -5353,7 +5479,7 @@
                     <a:p>
                       <a:pPr algn="ctr"/>
                       <a:r>
-                        <a:rPr lang="en-US" sz="1100" b="0" dirty="0">
+                        <a:rPr lang="en-US" sz="950" b="0" dirty="0">
                           <a:solidFill>
                             <a:schemeClr val="tx1"/>
                           </a:solidFill>
@@ -5453,7 +5579,7 @@
                     <a:p>
                       <a:pPr algn="ctr"/>
                       <a:r>
-                        <a:rPr lang="en-US" sz="1100" b="0" dirty="0"/>
+                        <a:rPr lang="en-US" sz="950" b="0" dirty="0"/>
                         <a:t>{{MODULO_2}}</a:t>
                       </a:r>
                     </a:p>
@@ -5541,7 +5667,7 @@
                     <a:p>
                       <a:pPr algn="ctr"/>
                       <a:r>
-                        <a:rPr lang="en-US" sz="1100" b="0" dirty="0"/>
+                        <a:rPr lang="en-US" sz="950" b="0" dirty="0"/>
                         <a:t>{{MODULO_3}}</a:t>
                       </a:r>
                     </a:p>
@@ -5645,7 +5771,7 @@
                     <a:p>
                       <a:pPr algn="ctr"/>
                       <a:r>
-                        <a:rPr lang="en-US" sz="1100" b="0" dirty="0"/>
+                        <a:rPr lang="en-US" sz="950" b="0" dirty="0"/>
                         <a:t>{{MODULO_4}}</a:t>
                       </a:r>
                     </a:p>
@@ -5749,7 +5875,7 @@
                     <a:p>
                       <a:pPr algn="ctr"/>
                       <a:r>
-                        <a:rPr lang="en-US" sz="1100" b="0" dirty="0"/>
+                        <a:rPr lang="en-US" sz="950" b="0" dirty="0"/>
                         <a:t>{{MODULO_5}}</a:t>
                       </a:r>
                     </a:p>
@@ -6159,67 +6285,6 @@
       </p:grpSp>
       <p:sp>
         <p:nvSpPr>
-          <p:cNvPr id="7" name="Rectángulo 6">
-            <a:extLst>
-              <a:ext uri="{FF2B5EF4-FFF2-40B4-BE49-F238E27FC236}">
-                <a16:creationId xmlns:a16="http://schemas.microsoft.com/office/drawing/2014/main" id="{05C52596-06F9-34E5-BF0B-633F1D4E78A2}"/>
-              </a:ext>
-            </a:extLst>
-          </p:cNvPr>
-          <p:cNvSpPr/>
-          <p:nvPr/>
-        </p:nvSpPr>
-        <p:spPr>
-          <a:xfrm>
-            <a:off x="4541929" y="8673847"/>
-            <a:ext cx="2130198" cy="382156"/>
-          </a:xfrm>
-          <a:prstGeom prst="rect">
-            <a:avLst/>
-          </a:prstGeom>
-        </p:spPr>
-        <p:txBody>
-          <a:bodyPr wrap="square">
-            <a:spAutoFit/>
-          </a:bodyPr>
-          <a:lstStyle/>
-          <a:p>
-            <a:pPr lvl="0" algn="ctr">
-              <a:spcBef>
-                <a:spcPts val="59"/>
-              </a:spcBef>
-            </a:pPr>
-            <a:r>
-              <a:rPr lang="es-PE" sz="900" dirty="0">
-                <a:solidFill>
-                  <a:prstClr val="black"/>
-                </a:solidFill>
-                <a:latin typeface="Times New Roman" panose="02020603050405020304" pitchFamily="18" charset="0"/>
-                <a:ea typeface="Cambria Math" panose="02040503050406030204" pitchFamily="18" charset="0"/>
-                <a:cs typeface="Times New Roman" panose="02020603050405020304" pitchFamily="18" charset="0"/>
-              </a:rPr>
-              <a:t>CÓDIGO ESTUDIANTE:</a:t>
-            </a:r>
-          </a:p>
-          <a:p>
-            <a:pPr lvl="0" algn="ctr">
-              <a:spcBef>
-                <a:spcPts val="59"/>
-              </a:spcBef>
-            </a:pPr>
-            <a:endParaRPr lang="es-PE" sz="900" dirty="0">
-              <a:solidFill>
-                <a:prstClr val="black"/>
-              </a:solidFill>
-              <a:latin typeface="Times New Roman" panose="02020603050405020304" pitchFamily="18" charset="0"/>
-              <a:ea typeface="Cambria Math" panose="02040503050406030204" pitchFamily="18" charset="0"/>
-              <a:cs typeface="Times New Roman" panose="02020603050405020304" pitchFamily="18" charset="0"/>
-            </a:endParaRPr>
-          </a:p>
-        </p:txBody>
-      </p:sp>
-      <p:sp>
-        <p:nvSpPr>
           <p:cNvPr id="2" name="CuadroTexto 1">
             <a:extLst>
               <a:ext uri="{FF2B5EF4-FFF2-40B4-BE49-F238E27FC236}">
@@ -6251,6 +6316,78 @@
               <a:t>{{QR_CODE}}</a:t>
             </a:r>
             <a:endParaRPr lang="es-PE" dirty="0"/>
+          </a:p>
+        </p:txBody>
+      </p:sp>
+      <p:sp>
+        <p:nvSpPr>
+          <p:cNvPr id="8" name="Rectángulo 7">
+            <a:extLst>
+              <a:ext uri="{FF2B5EF4-FFF2-40B4-BE49-F238E27FC236}">
+                <a16:creationId xmlns:a16="http://schemas.microsoft.com/office/drawing/2014/main" id="{B189EA9C-DEA9-BE89-112A-39BEF111B735}"/>
+              </a:ext>
+            </a:extLst>
+          </p:cNvPr>
+          <p:cNvSpPr/>
+          <p:nvPr/>
+        </p:nvSpPr>
+        <p:spPr>
+          <a:xfrm>
+            <a:off x="4541929" y="8673847"/>
+            <a:ext cx="2130198" cy="382156"/>
+          </a:xfrm>
+          <a:prstGeom prst="rect">
+            <a:avLst/>
+          </a:prstGeom>
+        </p:spPr>
+        <p:txBody>
+          <a:bodyPr wrap="square">
+            <a:spAutoFit/>
+          </a:bodyPr>
+          <a:lstStyle/>
+          <a:p>
+            <a:pPr lvl="0" algn="ctr">
+              <a:spcBef>
+                <a:spcPts val="59"/>
+              </a:spcBef>
+            </a:pPr>
+            <a:r>
+              <a:rPr lang="es-PE" sz="900" dirty="0">
+                <a:solidFill>
+                  <a:prstClr val="black"/>
+                </a:solidFill>
+                <a:latin typeface="Times New Roman" panose="02020603050405020304" pitchFamily="18" charset="0"/>
+                <a:ea typeface="Cambria Math" panose="02040503050406030204" pitchFamily="18" charset="0"/>
+                <a:cs typeface="Times New Roman" panose="02020603050405020304" pitchFamily="18" charset="0"/>
+              </a:rPr>
+              <a:t>CÓDIGO ESTUDIANTE:</a:t>
+            </a:r>
+          </a:p>
+          <a:p>
+            <a:pPr lvl="0" algn="ctr">
+              <a:spcBef>
+                <a:spcPts val="59"/>
+              </a:spcBef>
+            </a:pPr>
+            <a:r>
+              <a:rPr lang="es-PE" sz="900" b="1">
+                <a:solidFill>
+                  <a:prstClr val="black"/>
+                </a:solidFill>
+                <a:latin typeface="Times New Roman" panose="02020603050405020304" pitchFamily="18" charset="0"/>
+                <a:ea typeface="Cambria Math" panose="02040503050406030204" pitchFamily="18" charset="0"/>
+                <a:cs typeface="Times New Roman" panose="02020603050405020304" pitchFamily="18" charset="0"/>
+              </a:rPr>
+              <a:t>{{CODE_STUDENT}}</a:t>
+            </a:r>
+            <a:endParaRPr lang="es-PE" sz="900" b="1" dirty="0">
+              <a:solidFill>
+                <a:prstClr val="black"/>
+              </a:solidFill>
+              <a:latin typeface="Times New Roman" panose="02020603050405020304" pitchFamily="18" charset="0"/>
+              <a:ea typeface="Cambria Math" panose="02040503050406030204" pitchFamily="18" charset="0"/>
+              <a:cs typeface="Times New Roman" panose="02020603050405020304" pitchFamily="18" charset="0"/>
+            </a:endParaRPr>
           </a:p>
         </p:txBody>
       </p:sp>
